--- a/word-drafts/figures/Observability-Fig9-Health-DataSet.pptx
+++ b/word-drafts/figures/Observability-Fig9-Health-DataSet.pptx
@@ -3517,7 +3517,7 @@
         <p:spPr>
           <a:xfrm>
             <a:off x="2024062" y="1228725"/>
-            <a:ext cx="504825" cy="123825"/>
+            <a:ext cx="638175" cy="123825"/>
           </a:xfrm>
           <a:prstGeom prst="rect">
             <a:avLst/>
@@ -3588,7 +3588,7 @@
         <p:spPr>
           <a:xfrm>
             <a:off x="3309937" y="1228725"/>
-            <a:ext cx="619125" cy="123825"/>
+            <a:ext cx="762000" cy="123825"/>
           </a:xfrm>
           <a:prstGeom prst="rect">
             <a:avLst/>
@@ -3660,7 +3660,7 @@
         <p:spPr>
           <a:xfrm>
             <a:off x="2667000" y="2314575"/>
-            <a:ext cx="485775" cy="123825"/>
+            <a:ext cx="609600" cy="123825"/>
           </a:xfrm>
           <a:prstGeom prst="rect">
             <a:avLst/>
@@ -3731,7 +3731,7 @@
         <p:spPr>
           <a:xfrm>
             <a:off x="3952875" y="2314575"/>
-            <a:ext cx="619125" cy="123825"/>
+            <a:ext cx="762000" cy="123825"/>
           </a:xfrm>
           <a:prstGeom prst="rect">
             <a:avLst/>
@@ -3802,7 +3802,7 @@
         <p:spPr>
           <a:xfrm>
             <a:off x="3309937" y="3400425"/>
-            <a:ext cx="619125" cy="123825"/>
+            <a:ext cx="762000" cy="123825"/>
           </a:xfrm>
           <a:prstGeom prst="rect">
             <a:avLst/>
@@ -3873,7 +3873,7 @@
         <p:spPr>
           <a:xfrm>
             <a:off x="2667000" y="4486275"/>
-            <a:ext cx="542925" cy="123825"/>
+            <a:ext cx="666750" cy="123825"/>
           </a:xfrm>
           <a:prstGeom prst="rect">
             <a:avLst/>
